--- a/example/trae_GLM-5.3-flash_个人信息介绍.pptx
+++ b/example/trae_GLM-5.3-flash_个人信息介绍.pptx
@@ -1071,7 +1071,7 @@
           <a:lstStyle/>
           <a:p>
             <a:r>
-              <a:t>我把方法沉淀为开源资产：博客是高端前端工作流参考实现，GSAP 滚动叙事、手写正则高亮、零第三方依赖；Haute 蒸馏 GSAP 官方技能四路分发；Universal PPT 蒸馏 17 个技能建成六场景八路径，均 MIT 开源。</a:t>
+              <a:t>我把方法沉淀为开源资产：博客是高端前端工作流参考实现，GSAP 滚动叙事、手写正则高亮、零第三方依赖；Haute 提炼 GSAP 官方技能四路分发；Universal PPT 提炼 17 个技能建成六场景八路径，均 MIT 开源。</a:t>
             </a:r>
           </a:p>
         </p:txBody>
@@ -11748,7 +11748,7 @@
                 <a:latin typeface="微软雅黑"/>
                 <a:ea typeface="微软雅黑"/>
               </a:rPr>
-              <a:t>一个参考实现博客 + 两个蒸馏技能</a:t>
+              <a:t>一个参考实现博客 + 两个提炼技能</a:t>
             </a:r>
           </a:p>
         </p:txBody>
@@ -12582,7 +12582,7 @@
                 <a:latin typeface="微软雅黑"/>
                 <a:ea typeface="微软雅黑"/>
               </a:rPr>
-              <a:t>蒸馏 GSAP 官方技能精华</a:t>
+              <a:t>提炼 GSAP 官方技能精华</a:t>
             </a:r>
           </a:p>
         </p:txBody>
@@ -12788,7 +12788,7 @@
                 <a:latin typeface="微软雅黑"/>
                 <a:ea typeface="微软雅黑"/>
               </a:rPr>
-              <a:t>蒸馏 17 个开源技能</a:t>
+              <a:t>提炼 17 个开源技能</a:t>
             </a:r>
           </a:p>
         </p:txBody>
@@ -14574,7 +14574,7 @@
                 <a:latin typeface="微软雅黑"/>
                 <a:ea typeface="微软雅黑"/>
               </a:rPr>
-              <a:t>技能蒸馏</a:t>
+              <a:t>技能提炼</a:t>
             </a:r>
           </a:p>
         </p:txBody>
